--- a/examples/08_academic_attention/Presentation.pptx
+++ b/examples/08_academic_attention/Presentation.pptx
@@ -7,10 +7,9 @@
   <p:sldIdLst>
     <p:sldId id="256" r:id="rId2"/>
     <p:sldId id="257" r:id="rId3"/>
-    <p:sldId id="258" r:id="rId4"/>
   </p:sldIdLst>
   <p:notesMasterIdLst>
-    <p:notesMasterId r:id="rId5"/>
+    <p:notesMasterId r:id="rId4"/>
   </p:notesMasterIdLst>
   <p:sldSz cx="12192000" cy="6858000"/>
   <p:notesSz cx="6858000" cy="12192000"/>
@@ -504,8 +503,8 @@
           <a:p>
             <a:r>
               <a:rPr lang="en-US" dirty="0"/>
-              <a:t>1. Hero
-note: [오프닝] 100만 토큰을 선형 시간 복잡도 O(N)으로 처리하는 새로운 어텐션 이론을 발표합니다.</a:t>
+              <a:t>Slide 1: Academic Paper Layout
+note: NeurIPS 오럴 논문의 이론적 증명과 선형 복잡도 수식 설명입니다.</a:t>
             </a:r>
             <a:endParaRPr lang="en-US" dirty="0"/>
           </a:p>
@@ -593,8 +592,7 @@
           <a:p>
             <a:r>
               <a:rPr lang="en-US" dirty="0"/>
-              <a:t>2. Big Stats
-note: [이론 결과] O(N) 복잡도와 99.8% 검색 회수율을 입증하였습니다.</a:t>
+              <a:t>Slide 2: Academic Benchmark Matrix</a:t>
             </a:r>
             <a:endParaRPr lang="en-US" dirty="0"/>
           </a:p>
@@ -618,95 +616,6 @@
             <a:fld id="{F7021451-1387-4CA6-816F-3879F97B5CBC}" type="slidenum">
               <a:rPr lang="en-US"/>
               <a:t>2</a:t>
-            </a:fld>
-            <a:endParaRPr lang="en-US"/>
-          </a:p>
-        </p:txBody>
-      </p:sp>
-    </p:spTree>
-    <p:extLst>
-      <p:ext uri="{BB962C8B-B14F-4D97-AF65-F5344CB8AC3E}">
-        <p14:creationId xmlns:p14="http://schemas.microsoft.com/office/powerpoint/2010/main" val="1024086991"/>
-      </p:ext>
-    </p:extLst>
-  </p:cSld>
-  <p:clrMapOvr>
-    <a:masterClrMapping/>
-  </p:clrMapOvr>
-</p:notes>
-</file>
-
-<file path=ppt/notesSlides/notesSlide3.xml><?xml version="1.0" encoding="utf-8"?>
-<p:notes xmlns:a="http://schemas.openxmlformats.org/drawingml/2006/main" xmlns:r="http://schemas.openxmlformats.org/officeDocument/2006/relationships" xmlns:p="http://schemas.openxmlformats.org/presentationml/2006/main">
-  <p:cSld>
-    <p:spTree>
-      <p:nvGrpSpPr>
-        <p:cNvPr id="1" name=""/>
-        <p:cNvGrpSpPr/>
-        <p:nvPr/>
-      </p:nvGrpSpPr>
-      <p:grpSpPr>
-        <a:xfrm>
-          <a:off x="0" y="0"/>
-          <a:ext cx="0" cy="0"/>
-          <a:chOff x="0" y="0"/>
-          <a:chExt cx="0" cy="0"/>
-        </a:xfrm>
-      </p:grpSpPr>
-      <p:sp>
-        <p:nvSpPr>
-          <p:cNvPr id="2" name="Slide Image Placeholder 1"/>
-          <p:cNvSpPr>
-            <a:spLocks noGrp="1" noRot="1" noChangeAspect="1"/>
-          </p:cNvSpPr>
-          <p:nvPr>
-            <p:ph type="sldImg"/>
-          </p:nvPr>
-        </p:nvSpPr>
-        <p:spPr/>
-      </p:sp>
-      <p:sp>
-        <p:nvSpPr>
-          <p:cNvPr id="3" name="Notes Placeholder 2"/>
-          <p:cNvSpPr>
-            <a:spLocks noGrp="1"/>
-          </p:cNvSpPr>
-          <p:nvPr>
-            <p:ph type="body" idx="1"/>
-          </p:nvPr>
-        </p:nvSpPr>
-        <p:spPr/>
-        <p:txBody>
-          <a:bodyPr/>
-          <a:lstStyle/>
-          <a:p>
-            <a:r>
-              <a:rPr lang="en-US" dirty="0"/>
-              <a:t>3. Closing
-note: [마무리] 경청해 주셔서 감사합니다. 질의응답을 진행하겠습니다.</a:t>
-            </a:r>
-            <a:endParaRPr lang="en-US" dirty="0"/>
-          </a:p>
-        </p:txBody>
-      </p:sp>
-      <p:sp>
-        <p:nvSpPr>
-          <p:cNvPr id="4" name="Slide Number Placeholder 3"/>
-          <p:cNvSpPr>
-            <a:spLocks noGrp="1"/>
-          </p:cNvSpPr>
-          <p:nvPr>
-            <p:ph type="sldNum" sz="quarter" idx="10"/>
-          </p:nvPr>
-        </p:nvSpPr>
-        <p:spPr/>
-        <p:txBody>
-          <a:bodyPr/>
-          <a:lstStyle/>
-          <a:p>
-            <a:fld id="{F7021451-1387-4CA6-816F-3879F97B5CBC}" type="slidenum">
-              <a:rPr lang="en-US"/>
-              <a:t>3</a:t>
             </a:fld>
             <a:endParaRPr lang="en-US"/>
           </a:p>
@@ -1074,45 +983,6 @@
 <file path=ppt/slides/slide2.xml><?xml version="1.0" encoding="utf-8"?>
 <p:sld xmlns:a="http://schemas.openxmlformats.org/drawingml/2006/main" xmlns:r="http://schemas.openxmlformats.org/officeDocument/2006/relationships" xmlns:p="http://schemas.openxmlformats.org/presentationml/2006/main">
   <p:cSld name="Slide 2">
-    <p:bg>
-      <p:bgPr>
-        <a:blipFill dpi="0" rotWithShape="1">
-          <a:blip r:embed="rId1">
-            <a:lum/>
-          </a:blip>
-          <a:srcRect/>
-          <a:stretch>
-            <a:fillRect/>
-          </a:stretch>
-        </a:blipFill>
-        <a:effectLst/>
-      </p:bgPr>
-    </p:bg>
-    <p:spTree>
-      <p:nvGrpSpPr>
-        <p:cNvPr id="1" name=""/>
-        <p:cNvGrpSpPr/>
-        <p:nvPr/>
-      </p:nvGrpSpPr>
-      <p:grpSpPr>
-        <a:xfrm>
-          <a:off x="0" y="0"/>
-          <a:ext cx="0" cy="0"/>
-          <a:chOff x="0" y="0"/>
-          <a:chExt cx="0" cy="0"/>
-        </a:xfrm>
-      </p:grpSpPr>
-    </p:spTree>
-  </p:cSld>
-  <p:clrMapOvr>
-    <a:masterClrMapping/>
-  </p:clrMapOvr>
-</p:sld>
-</file>
-
-<file path=ppt/slides/slide3.xml><?xml version="1.0" encoding="utf-8"?>
-<p:sld xmlns:a="http://schemas.openxmlformats.org/drawingml/2006/main" xmlns:r="http://schemas.openxmlformats.org/officeDocument/2006/relationships" xmlns:p="http://schemas.openxmlformats.org/presentationml/2006/main">
-  <p:cSld name="Slide 3">
     <p:bg>
       <p:bgPr>
         <a:blipFill dpi="0" rotWithShape="1">

--- a/examples/08_academic_attention/Presentation.pptx
+++ b/examples/08_academic_attention/Presentation.pptx
@@ -503,8 +503,7 @@
           <a:p>
             <a:r>
               <a:rPr lang="en-US" dirty="0"/>
-              <a:t>Slide 1: Academic Paper Layout
-note: NeurIPS 오럴 논문의 이론적 증명과 선형 복잡도 수식 설명입니다.</a:t>
+              <a:t>NeurIPS 오럴 논문의 이론적 증명과 선형 복잡도 수식 설명입니다.</a:t>
             </a:r>
             <a:endParaRPr lang="en-US" dirty="0"/>
           </a:p>
@@ -592,7 +591,7 @@
           <a:p>
             <a:r>
               <a:rPr lang="en-US" dirty="0"/>
-              <a:t>Slide 2: Academic Benchmark Matrix</a:t>
+              <a:t/>
             </a:r>
             <a:endParaRPr lang="en-US" dirty="0"/>
           </a:p>
@@ -946,16 +945,9 @@
   <p:cSld name="Slide 1">
     <p:bg>
       <p:bgPr>
-        <a:blipFill dpi="0" rotWithShape="1">
-          <a:blip r:embed="rId1">
-            <a:lum/>
-          </a:blip>
-          <a:srcRect/>
-          <a:stretch>
-            <a:fillRect/>
-          </a:stretch>
-        </a:blipFill>
-        <a:effectLst/>
+        <a:solidFill>
+          <a:srgbClr val="FAF9F6"/>
+        </a:solidFill>
       </p:bgPr>
     </p:bg>
     <p:spTree>
@@ -972,6 +964,501 @@
           <a:chExt cx="0" cy="0"/>
         </a:xfrm>
       </p:grpSpPr>
+      <p:sp>
+        <p:nvSpPr>
+          <p:cNvPr id="2" name="Shape 0"/>
+          <p:cNvSpPr/>
+          <p:nvPr/>
+        </p:nvSpPr>
+        <p:spPr>
+          <a:xfrm>
+            <a:off x="609630" y="806135"/>
+            <a:ext cx="10972800" cy="9510"/>
+          </a:xfrm>
+          <a:prstGeom prst="rect">
+            <a:avLst/>
+          </a:prstGeom>
+          <a:solidFill>
+            <a:srgbClr val="1E1B4B"/>
+          </a:solidFill>
+          <a:ln/>
+        </p:spPr>
+      </p:sp>
+      <p:sp>
+        <p:nvSpPr>
+          <p:cNvPr id="3" name="Text 1"/>
+          <p:cNvSpPr txBox="1"/>
+          <p:nvPr/>
+        </p:nvSpPr>
+        <p:spPr>
+          <a:xfrm>
+            <a:off x="590520" y="416143"/>
+            <a:ext cx="3965844" cy="310805"/>
+          </a:xfrm>
+          <a:prstGeom prst="rect">
+            <a:avLst/>
+          </a:prstGeom>
+          <a:noFill/>
+          <a:ln/>
+        </p:spPr>
+        <p:txBody>
+          <a:bodyPr wrap="none" lIns="0" tIns="0" rIns="0" bIns="0" rtlCol="0" anchor="t"/>
+          <a:lstStyle/>
+          <a:p>
+            <a:pPr algn="l" indent="0" marL="0">
+              <a:lnSpc>
+                <a:spcPts val="2447"/>
+              </a:lnSpc>
+              <a:buNone/>
+            </a:pPr>
+            <a:r>
+              <a:rPr lang="en-US" sz="1631" b="1" spc="-22" kern="0" dirty="0">
+                <a:solidFill>
+                  <a:srgbClr val="1E1B4B"/>
+                </a:solidFill>
+                <a:latin typeface="STIX Two Text" pitchFamily="34" charset="0"/>
+                <a:ea typeface="STIX Two Text" pitchFamily="34" charset="-122"/>
+                <a:cs typeface="STIX Two Text" pitchFamily="34" charset="-120"/>
+              </a:rPr>
+              <a:t>NEURIPS 2026 ORAL PRESENTATION</a:t>
+            </a:r>
+            <a:endParaRPr lang="en-US" sz="1631" dirty="0"/>
+          </a:p>
+        </p:txBody>
+      </p:sp>
+      <p:sp>
+        <p:nvSpPr>
+          <p:cNvPr id="4" name="Text 2"/>
+          <p:cNvSpPr txBox="1"/>
+          <p:nvPr/>
+        </p:nvSpPr>
+        <p:spPr>
+          <a:xfrm>
+            <a:off x="9068653" y="416143"/>
+            <a:ext cx="2713299" cy="310805"/>
+          </a:xfrm>
+          <a:prstGeom prst="rect">
+            <a:avLst/>
+          </a:prstGeom>
+          <a:noFill/>
+          <a:ln/>
+        </p:spPr>
+        <p:txBody>
+          <a:bodyPr wrap="none" lIns="0" tIns="0" rIns="0" bIns="0" rtlCol="0" anchor="t"/>
+          <a:lstStyle/>
+          <a:p>
+            <a:pPr algn="l" indent="0" marL="0">
+              <a:lnSpc>
+                <a:spcPts val="2447"/>
+              </a:lnSpc>
+              <a:buNone/>
+            </a:pPr>
+            <a:r>
+              <a:rPr lang="en-US" sz="1631" b="1" spc="-22" kern="0" dirty="0">
+                <a:solidFill>
+                  <a:srgbClr val="1E1B4B"/>
+                </a:solidFill>
+                <a:latin typeface="STIX Two Text" pitchFamily="34" charset="0"/>
+                <a:ea typeface="STIX Two Text" pitchFamily="34" charset="-122"/>
+                <a:cs typeface="STIX Two Text" pitchFamily="34" charset="-120"/>
+              </a:rPr>
+              <a:t>ARXIV: 2608.01248 [CS.LG]</a:t>
+            </a:r>
+            <a:endParaRPr lang="en-US" sz="1631" dirty="0"/>
+          </a:p>
+        </p:txBody>
+      </p:sp>
+      <p:sp>
+        <p:nvSpPr>
+          <p:cNvPr id="5" name="Text 3"/>
+          <p:cNvSpPr txBox="1"/>
+          <p:nvPr/>
+        </p:nvSpPr>
+        <p:spPr>
+          <a:xfrm>
+            <a:off x="590520" y="1694566"/>
+            <a:ext cx="11010930" cy="1346637"/>
+          </a:xfrm>
+          <a:prstGeom prst="rect">
+            <a:avLst/>
+          </a:prstGeom>
+          <a:noFill/>
+          <a:ln/>
+        </p:spPr>
+        <p:txBody>
+          <a:bodyPr wrap="square" lIns="0" tIns="0" rIns="0" bIns="0" rtlCol="0" anchor="t"/>
+          <a:lstStyle/>
+          <a:p>
+            <a:pPr algn="l" indent="0" marL="0">
+              <a:lnSpc>
+                <a:spcPts val="5302"/>
+              </a:lnSpc>
+              <a:buNone/>
+            </a:pPr>
+            <a:r>
+              <a:rPr lang="en-US" sz="4241" b="1" spc="-22" kern="0" dirty="0">
+                <a:solidFill>
+                  <a:srgbClr val="1E1B4B"/>
+                </a:solidFill>
+                <a:latin typeface="Malgun Gothic" pitchFamily="34" charset="0"/>
+                <a:ea typeface="Malgun Gothic" pitchFamily="34" charset="-122"/>
+                <a:cs typeface="Malgun Gothic" pitchFamily="34" charset="-120"/>
+              </a:rPr>
+              <a:t>선형 시간 복잡도 어텐션을 통한</a:t>
+            </a:r>
+            <a:endParaRPr lang="en-US" sz="4241" dirty="0"/>
+          </a:p>
+          <a:p>
+            <a:pPr algn="l" indent="0" marL="0">
+              <a:lnSpc>
+                <a:spcPts val="5302"/>
+              </a:lnSpc>
+              <a:buNone/>
+            </a:pPr>
+            <a:r>
+              <a:rPr lang="en-US" sz="4241" b="1" spc="-22" kern="0" dirty="0">
+                <a:solidFill>
+                  <a:srgbClr val="4338CA"/>
+                </a:solidFill>
+                <a:latin typeface="Malgun Gothic" pitchFamily="34" charset="0"/>
+                <a:ea typeface="Malgun Gothic" pitchFamily="34" charset="-122"/>
+                <a:cs typeface="Malgun Gothic" pitchFamily="34" charset="-120"/>
+              </a:rPr>
+              <a:t>O(N) 초경량 트랜스포머의 이론적 증명</a:t>
+            </a:r>
+            <a:endParaRPr lang="en-US" sz="4241" dirty="0"/>
+          </a:p>
+        </p:txBody>
+      </p:sp>
+      <p:sp>
+        <p:nvSpPr>
+          <p:cNvPr id="6" name="Text 4"/>
+          <p:cNvSpPr txBox="1"/>
+          <p:nvPr/>
+        </p:nvSpPr>
+        <p:spPr>
+          <a:xfrm>
+            <a:off x="590520" y="3275289"/>
+            <a:ext cx="11869644" cy="194310"/>
+          </a:xfrm>
+          <a:prstGeom prst="rect">
+            <a:avLst/>
+          </a:prstGeom>
+          <a:noFill/>
+          <a:ln/>
+        </p:spPr>
+        <p:txBody>
+          <a:bodyPr wrap="none" lIns="0" tIns="0" rIns="0" bIns="0" rtlCol="0" anchor="t"/>
+          <a:lstStyle/>
+          <a:p>
+            <a:pPr algn="l" indent="0" marL="0">
+              <a:lnSpc>
+                <a:spcPts val="1530"/>
+              </a:lnSpc>
+              <a:buNone/>
+            </a:pPr>
+            <a:r>
+              <a:rPr lang="en-US" sz="1020" b="1" spc="-22" kern="0" dirty="0">
+                <a:solidFill>
+                  <a:srgbClr val="4338CA"/>
+                </a:solidFill>
+                <a:latin typeface="STIX Two Text" pitchFamily="34" charset="0"/>
+                <a:ea typeface="STIX Two Text" pitchFamily="34" charset="-122"/>
+                <a:cs typeface="STIX Two Text" pitchFamily="34" charset="-120"/>
+              </a:rPr>
+              <a:t>서울대학교 AI연구원 • 딥러닝 이론 연구실</a:t>
+            </a:r>
+            <a:endParaRPr lang="en-US" sz="1020" dirty="0"/>
+          </a:p>
+        </p:txBody>
+      </p:sp>
+      <p:sp>
+        <p:nvSpPr>
+          <p:cNvPr id="7" name="Shape 5"/>
+          <p:cNvSpPr/>
+          <p:nvPr/>
+        </p:nvSpPr>
+        <p:spPr>
+          <a:xfrm>
+            <a:off x="609630" y="3590483"/>
+            <a:ext cx="10972800" cy="1677741"/>
+          </a:xfrm>
+          <a:prstGeom prst="rect">
+            <a:avLst/>
+          </a:prstGeom>
+          <a:solidFill>
+            <a:srgbClr val="F1F0EA"/>
+          </a:solidFill>
+          <a:ln/>
+        </p:spPr>
+      </p:sp>
+      <p:sp>
+        <p:nvSpPr>
+          <p:cNvPr id="8" name="Shape 6"/>
+          <p:cNvSpPr/>
+          <p:nvPr/>
+        </p:nvSpPr>
+        <p:spPr>
+          <a:xfrm>
+            <a:off x="609630" y="3590483"/>
+            <a:ext cx="38130" cy="1677741"/>
+          </a:xfrm>
+          <a:prstGeom prst="rect">
+            <a:avLst/>
+          </a:prstGeom>
+          <a:solidFill>
+            <a:srgbClr val="1E1B4B"/>
+          </a:solidFill>
+          <a:ln/>
+        </p:spPr>
+      </p:sp>
+      <p:sp>
+        <p:nvSpPr>
+          <p:cNvPr id="9" name="Text 7"/>
+          <p:cNvSpPr txBox="1"/>
+          <p:nvPr/>
+        </p:nvSpPr>
+        <p:spPr>
+          <a:xfrm>
+            <a:off x="800100" y="3695456"/>
+            <a:ext cx="10629900" cy="704362"/>
+          </a:xfrm>
+          <a:prstGeom prst="rect">
+            <a:avLst/>
+          </a:prstGeom>
+          <a:noFill/>
+          <a:ln/>
+        </p:spPr>
+        <p:txBody>
+          <a:bodyPr wrap="square" lIns="0" tIns="0" rIns="0" bIns="0" rtlCol="0" anchor="t"/>
+          <a:lstStyle/>
+          <a:p>
+            <a:pPr algn="l" indent="0" marL="0">
+              <a:lnSpc>
+                <a:spcPts val="2773"/>
+              </a:lnSpc>
+              <a:buNone/>
+            </a:pPr>
+            <a:r>
+              <a:rPr lang="en-US" sz="1849" b="1" spc="-22" kern="0" dirty="0">
+                <a:solidFill>
+                  <a:srgbClr val="1E1B4B"/>
+                </a:solidFill>
+                <a:latin typeface="STIX Two Text" pitchFamily="34" charset="0"/>
+                <a:ea typeface="STIX Two Text" pitchFamily="34" charset="-122"/>
+                <a:cs typeface="STIX Two Text" pitchFamily="34" charset="-120"/>
+              </a:rPr>
+              <a:t>Theorem 1 (Linear Convergence).</a:t>
+            </a:r>
+            <a:pPr algn="l" indent="0" marL="0">
+              <a:lnSpc>
+                <a:spcPts val="2773"/>
+              </a:lnSpc>
+              <a:buNone/>
+            </a:pPr>
+            <a:r>
+              <a:rPr lang="en-US" sz="1849" spc="-22" kern="0" dirty="0">
+                <a:solidFill>
+                  <a:srgbClr val="1E1B4B"/>
+                </a:solidFill>
+                <a:latin typeface="STIX Two Text" pitchFamily="34" charset="0"/>
+                <a:ea typeface="STIX Two Text" pitchFamily="34" charset="-122"/>
+                <a:cs typeface="STIX Two Text" pitchFamily="34" charset="-120"/>
+              </a:rPr>
+              <a:t> Let \( \phi(x) \) be the kernel feature map with Taylor expansion order \( k \). Then the attention matrix multiplication satisfies:</a:t>
+            </a:r>
+            <a:endParaRPr lang="en-US" sz="1849" dirty="0"/>
+          </a:p>
+        </p:txBody>
+      </p:sp>
+      <p:sp>
+        <p:nvSpPr>
+          <p:cNvPr id="10" name="Text 8"/>
+          <p:cNvSpPr txBox="1"/>
+          <p:nvPr/>
+        </p:nvSpPr>
+        <p:spPr>
+          <a:xfrm>
+            <a:off x="800100" y="4792188"/>
+            <a:ext cx="11458164" cy="352227"/>
+          </a:xfrm>
+          <a:prstGeom prst="rect">
+            <a:avLst/>
+          </a:prstGeom>
+          <a:noFill/>
+          <a:ln/>
+        </p:spPr>
+        <p:txBody>
+          <a:bodyPr wrap="none" lIns="0" tIns="0" rIns="0" bIns="0" rtlCol="0" anchor="t"/>
+          <a:lstStyle/>
+          <a:p>
+            <a:pPr algn="l" indent="0" marL="0">
+              <a:lnSpc>
+                <a:spcPts val="2773"/>
+              </a:lnSpc>
+              <a:buNone/>
+            </a:pPr>
+            <a:r>
+              <a:rPr lang="en-US" sz="1849" spc="-22" kern="0" dirty="0">
+                <a:solidFill>
+                  <a:srgbClr val="1E1B4B"/>
+                </a:solidFill>
+                <a:latin typeface="STIX Two Text" pitchFamily="34" charset="0"/>
+                <a:ea typeface="STIX Two Text" pitchFamily="34" charset="-122"/>
+                <a:cs typeface="STIX Two Text" pitchFamily="34" charset="-120"/>
+              </a:rPr>
+              <a:t>with zero loss on 1,000,000 token context retrieval.</a:t>
+            </a:r>
+            <a:endParaRPr lang="en-US" sz="1849" dirty="0"/>
+          </a:p>
+        </p:txBody>
+      </p:sp>
+      <p:sp>
+        <p:nvSpPr>
+          <p:cNvPr id="11" name="Text 9"/>
+          <p:cNvSpPr txBox="1"/>
+          <p:nvPr/>
+        </p:nvSpPr>
+        <p:spPr>
+          <a:xfrm>
+            <a:off x="-28164" y="4484583"/>
+            <a:ext cx="12286518" cy="240030"/>
+          </a:xfrm>
+          <a:prstGeom prst="rect">
+            <a:avLst/>
+          </a:prstGeom>
+          <a:noFill/>
+          <a:ln/>
+        </p:spPr>
+        <p:txBody>
+          <a:bodyPr wrap="none" lIns="0" tIns="0" rIns="0" bIns="0" rtlCol="0" anchor="t"/>
+          <a:lstStyle/>
+          <a:p>
+            <a:pPr algn="ctr" indent="0" marL="0">
+              <a:lnSpc>
+                <a:spcPts val="1890"/>
+              </a:lnSpc>
+              <a:buNone/>
+            </a:pPr>
+            <a:r>
+              <a:rPr lang="en-US" sz="1260" b="1" spc="-22" kern="0" dirty="0">
+                <a:solidFill>
+                  <a:srgbClr val="1E1B4B"/>
+                </a:solidFill>
+                <a:latin typeface="STIX Two Text" pitchFamily="34" charset="0"/>
+                <a:ea typeface="STIX Two Text" pitchFamily="34" charset="-122"/>
+                <a:cs typeface="STIX Two Text" pitchFamily="34" charset="-120"/>
+              </a:rPr>
+              <a:t>\( \text{Time Complexity} = O(N \cdot d^2) \ll O(N^2 \cdot d) \)</a:t>
+            </a:r>
+            <a:endParaRPr lang="en-US" sz="1260" dirty="0"/>
+          </a:p>
+        </p:txBody>
+      </p:sp>
+      <p:sp>
+        <p:nvSpPr>
+          <p:cNvPr id="12" name="Shape 10"/>
+          <p:cNvSpPr/>
+          <p:nvPr/>
+        </p:nvSpPr>
+        <p:spPr>
+          <a:xfrm>
+            <a:off x="609630" y="6188659"/>
+            <a:ext cx="10972800" cy="9510"/>
+          </a:xfrm>
+          <a:prstGeom prst="rect">
+            <a:avLst/>
+          </a:prstGeom>
+          <a:solidFill>
+            <a:srgbClr val="D4D2C9"/>
+          </a:solidFill>
+          <a:ln/>
+        </p:spPr>
+      </p:sp>
+      <p:sp>
+        <p:nvSpPr>
+          <p:cNvPr id="13" name="Text 11"/>
+          <p:cNvSpPr txBox="1"/>
+          <p:nvPr/>
+        </p:nvSpPr>
+        <p:spPr>
+          <a:xfrm>
+            <a:off x="590520" y="6268303"/>
+            <a:ext cx="3460090" cy="164592"/>
+          </a:xfrm>
+          <a:prstGeom prst="rect">
+            <a:avLst/>
+          </a:prstGeom>
+          <a:noFill/>
+          <a:ln/>
+        </p:spPr>
+        <p:txBody>
+          <a:bodyPr wrap="none" lIns="0" tIns="0" rIns="0" bIns="0" rtlCol="0" anchor="t"/>
+          <a:lstStyle/>
+          <a:p>
+            <a:pPr algn="l" indent="0" marL="0">
+              <a:lnSpc>
+                <a:spcPts val="1296"/>
+              </a:lnSpc>
+              <a:buNone/>
+            </a:pPr>
+            <a:r>
+              <a:rPr lang="en-US" sz="864" spc="-22" kern="0" dirty="0">
+                <a:solidFill>
+                  <a:srgbClr val="64748B"/>
+                </a:solidFill>
+                <a:latin typeface="STIX Two Text" pitchFamily="34" charset="0"/>
+                <a:ea typeface="STIX Two Text" pitchFamily="34" charset="-122"/>
+                <a:cs typeface="STIX Two Text" pitchFamily="34" charset="-120"/>
+              </a:rPr>
+              <a:t>Keywords: Linear Attention, Kernel Approximation, Long-Context LLMs</a:t>
+            </a:r>
+            <a:endParaRPr lang="en-US" sz="864" dirty="0"/>
+          </a:p>
+        </p:txBody>
+      </p:sp>
+      <p:sp>
+        <p:nvSpPr>
+          <p:cNvPr id="14" name="Text 12"/>
+          <p:cNvSpPr txBox="1"/>
+          <p:nvPr/>
+        </p:nvSpPr>
+        <p:spPr>
+          <a:xfrm>
+            <a:off x="10016155" y="6268303"/>
+            <a:ext cx="1690086" cy="164592"/>
+          </a:xfrm>
+          <a:prstGeom prst="rect">
+            <a:avLst/>
+          </a:prstGeom>
+          <a:noFill/>
+          <a:ln/>
+        </p:spPr>
+        <p:txBody>
+          <a:bodyPr wrap="none" lIns="0" tIns="0" rIns="0" bIns="0" rtlCol="0" anchor="t"/>
+          <a:lstStyle/>
+          <a:p>
+            <a:pPr algn="l" indent="0" marL="0">
+              <a:lnSpc>
+                <a:spcPts val="1296"/>
+              </a:lnSpc>
+              <a:buNone/>
+            </a:pPr>
+            <a:r>
+              <a:rPr lang="en-US" sz="864" spc="-22" kern="0" dirty="0">
+                <a:solidFill>
+                  <a:srgbClr val="64748B"/>
+                </a:solidFill>
+                <a:latin typeface="STIX Two Text" pitchFamily="34" charset="0"/>
+                <a:ea typeface="STIX Two Text" pitchFamily="34" charset="-122"/>
+                <a:cs typeface="STIX Two Text" pitchFamily="34" charset="-120"/>
+              </a:rPr>
+              <a:t>Correspondence: theory@snu.ac.kr</a:t>
+            </a:r>
+            <a:endParaRPr lang="en-US" sz="864" dirty="0"/>
+          </a:p>
+        </p:txBody>
+      </p:sp>
     </p:spTree>
   </p:cSld>
   <p:clrMapOvr>
@@ -985,16 +1472,9 @@
   <p:cSld name="Slide 2">
     <p:bg>
       <p:bgPr>
-        <a:blipFill dpi="0" rotWithShape="1">
-          <a:blip r:embed="rId1">
-            <a:lum/>
-          </a:blip>
-          <a:srcRect/>
-          <a:stretch>
-            <a:fillRect/>
-          </a:stretch>
-        </a:blipFill>
-        <a:effectLst/>
+        <a:solidFill>
+          <a:srgbClr val="FAF9F6"/>
+        </a:solidFill>
       </p:bgPr>
     </p:bg>
     <p:spTree>
@@ -1011,6 +1491,1267 @@
           <a:chExt cx="0" cy="0"/>
         </a:xfrm>
       </p:grpSpPr>
+      <p:sp>
+        <p:nvSpPr>
+          <p:cNvPr id="2" name="Shape 0"/>
+          <p:cNvSpPr/>
+          <p:nvPr/>
+        </p:nvSpPr>
+        <p:spPr>
+          <a:xfrm>
+            <a:off x="609630" y="806135"/>
+            <a:ext cx="10972800" cy="9510"/>
+          </a:xfrm>
+          <a:prstGeom prst="rect">
+            <a:avLst/>
+          </a:prstGeom>
+          <a:solidFill>
+            <a:srgbClr val="1E1B4B"/>
+          </a:solidFill>
+          <a:ln/>
+        </p:spPr>
+      </p:sp>
+      <p:sp>
+        <p:nvSpPr>
+          <p:cNvPr id="3" name="Text 1"/>
+          <p:cNvSpPr txBox="1"/>
+          <p:nvPr/>
+        </p:nvSpPr>
+        <p:spPr>
+          <a:xfrm>
+            <a:off x="590520" y="416143"/>
+            <a:ext cx="3343778" cy="310805"/>
+          </a:xfrm>
+          <a:prstGeom prst="rect">
+            <a:avLst/>
+          </a:prstGeom>
+          <a:noFill/>
+          <a:ln/>
+        </p:spPr>
+        <p:txBody>
+          <a:bodyPr wrap="none" lIns="0" tIns="0" rIns="0" bIns="0" rtlCol="0" anchor="t"/>
+          <a:lstStyle/>
+          <a:p>
+            <a:pPr algn="l" indent="0" marL="0">
+              <a:lnSpc>
+                <a:spcPts val="2447"/>
+              </a:lnSpc>
+              <a:buNone/>
+            </a:pPr>
+            <a:r>
+              <a:rPr lang="en-US" sz="1631" b="1" spc="-22" kern="0" dirty="0">
+                <a:solidFill>
+                  <a:srgbClr val="1E1B4B"/>
+                </a:solidFill>
+                <a:latin typeface="STIX Two Text" pitchFamily="34" charset="0"/>
+                <a:ea typeface="STIX Two Text" pitchFamily="34" charset="-122"/>
+                <a:cs typeface="STIX Two Text" pitchFamily="34" charset="-120"/>
+              </a:rPr>
+              <a:t>EXPERIMENTAL EVALUATION</a:t>
+            </a:r>
+            <a:endParaRPr lang="en-US" sz="1631" dirty="0"/>
+          </a:p>
+        </p:txBody>
+      </p:sp>
+      <p:sp>
+        <p:nvSpPr>
+          <p:cNvPr id="4" name="Text 2"/>
+          <p:cNvSpPr txBox="1"/>
+          <p:nvPr/>
+        </p:nvSpPr>
+        <p:spPr>
+          <a:xfrm>
+            <a:off x="6870802" y="416143"/>
+            <a:ext cx="5087082" cy="310805"/>
+          </a:xfrm>
+          <a:prstGeom prst="rect">
+            <a:avLst/>
+          </a:prstGeom>
+          <a:noFill/>
+          <a:ln/>
+        </p:spPr>
+        <p:txBody>
+          <a:bodyPr wrap="none" lIns="0" tIns="0" rIns="0" bIns="0" rtlCol="0" anchor="t"/>
+          <a:lstStyle/>
+          <a:p>
+            <a:pPr algn="l" indent="0" marL="0">
+              <a:lnSpc>
+                <a:spcPts val="2447"/>
+              </a:lnSpc>
+              <a:buNone/>
+            </a:pPr>
+            <a:r>
+              <a:rPr lang="en-US" sz="1631" b="1" spc="-22" kern="0" dirty="0">
+                <a:solidFill>
+                  <a:srgbClr val="1E1B4B"/>
+                </a:solidFill>
+                <a:latin typeface="STIX Two Text" pitchFamily="34" charset="0"/>
+                <a:ea typeface="STIX Two Text" pitchFamily="34" charset="-122"/>
+                <a:cs typeface="STIX Two Text" pitchFamily="34" charset="-120"/>
+              </a:rPr>
+              <a:t>TABLE 2: 1M CONTEXT RETRIEVAL ACCURACY</a:t>
+            </a:r>
+            <a:endParaRPr lang="en-US" sz="1631" dirty="0"/>
+          </a:p>
+        </p:txBody>
+      </p:sp>
+      <p:sp>
+        <p:nvSpPr>
+          <p:cNvPr id="5" name="Text 3"/>
+          <p:cNvSpPr txBox="1"/>
+          <p:nvPr/>
+        </p:nvSpPr>
+        <p:spPr>
+          <a:xfrm>
+            <a:off x="590520" y="2266066"/>
+            <a:ext cx="11869644" cy="285750"/>
+          </a:xfrm>
+          <a:prstGeom prst="rect">
+            <a:avLst/>
+          </a:prstGeom>
+          <a:noFill/>
+          <a:ln/>
+        </p:spPr>
+        <p:txBody>
+          <a:bodyPr wrap="none" lIns="0" tIns="0" rIns="0" bIns="0" rtlCol="0" anchor="t"/>
+          <a:lstStyle/>
+          <a:p>
+            <a:pPr algn="l" indent="0" marL="0">
+              <a:lnSpc>
+                <a:spcPts val="2250"/>
+              </a:lnSpc>
+              <a:buNone/>
+            </a:pPr>
+            <a:r>
+              <a:rPr lang="en-US" sz="1800" b="1" spc="-22" kern="0" dirty="0">
+                <a:solidFill>
+                  <a:srgbClr val="1E1B4B"/>
+                </a:solidFill>
+                <a:latin typeface="Malgun Gothic" pitchFamily="34" charset="0"/>
+                <a:ea typeface="Malgun Gothic" pitchFamily="34" charset="-122"/>
+                <a:cs typeface="Malgun Gothic" pitchFamily="34" charset="-120"/>
+              </a:rPr>
+              <a:t>기존 방식 대비 연산 복잡도 및 메모리 비교</a:t>
+            </a:r>
+            <a:endParaRPr lang="en-US" sz="1800" dirty="0"/>
+          </a:p>
+        </p:txBody>
+      </p:sp>
+      <p:sp>
+        <p:nvSpPr>
+          <p:cNvPr id="6" name="Shape 4"/>
+          <p:cNvSpPr/>
+          <p:nvPr/>
+        </p:nvSpPr>
+        <p:spPr>
+          <a:xfrm>
+            <a:off x="609630" y="4004249"/>
+            <a:ext cx="6446520" cy="19020"/>
+          </a:xfrm>
+          <a:prstGeom prst="rect">
+            <a:avLst/>
+          </a:prstGeom>
+          <a:solidFill>
+            <a:srgbClr val="1E1B4B"/>
+          </a:solidFill>
+          <a:ln/>
+        </p:spPr>
+      </p:sp>
+      <p:sp>
+        <p:nvSpPr>
+          <p:cNvPr id="7" name="Shape 5"/>
+          <p:cNvSpPr/>
+          <p:nvPr/>
+        </p:nvSpPr>
+        <p:spPr>
+          <a:xfrm>
+            <a:off x="609630" y="4952482"/>
+            <a:ext cx="6446520" cy="19020"/>
+          </a:xfrm>
+          <a:prstGeom prst="rect">
+            <a:avLst/>
+          </a:prstGeom>
+          <a:solidFill>
+            <a:srgbClr val="1E1B4B"/>
+          </a:solidFill>
+          <a:ln/>
+        </p:spPr>
+      </p:sp>
+      <p:sp>
+        <p:nvSpPr>
+          <p:cNvPr id="8" name="Shape 6"/>
+          <p:cNvSpPr/>
+          <p:nvPr/>
+        </p:nvSpPr>
+        <p:spPr>
+          <a:xfrm>
+            <a:off x="614385" y="4028023"/>
+            <a:ext cx="2976555" cy="306598"/>
+          </a:xfrm>
+          <a:prstGeom prst="rect">
+            <a:avLst/>
+          </a:prstGeom>
+          <a:solidFill>
+            <a:srgbClr val="FFFFFF"/>
+          </a:solidFill>
+          <a:ln/>
+        </p:spPr>
+      </p:sp>
+      <p:sp>
+        <p:nvSpPr>
+          <p:cNvPr id="9" name="Shape 7"/>
+          <p:cNvSpPr/>
+          <p:nvPr/>
+        </p:nvSpPr>
+        <p:spPr>
+          <a:xfrm>
+            <a:off x="614385" y="4028023"/>
+            <a:ext cx="2976555" cy="9510"/>
+          </a:xfrm>
+          <a:prstGeom prst="rect">
+            <a:avLst/>
+          </a:prstGeom>
+          <a:solidFill>
+            <a:srgbClr val="D1D9E0">
+              <a:alpha val="70000"/>
+            </a:srgbClr>
+          </a:solidFill>
+          <a:ln/>
+        </p:spPr>
+      </p:sp>
+      <p:sp>
+        <p:nvSpPr>
+          <p:cNvPr id="10" name="Shape 8"/>
+          <p:cNvSpPr/>
+          <p:nvPr/>
+        </p:nvSpPr>
+        <p:spPr>
+          <a:xfrm>
+            <a:off x="614385" y="4325112"/>
+            <a:ext cx="2976555" cy="9510"/>
+          </a:xfrm>
+          <a:prstGeom prst="rect">
+            <a:avLst/>
+          </a:prstGeom>
+          <a:solidFill>
+            <a:srgbClr val="1E1B4B"/>
+          </a:solidFill>
+          <a:ln/>
+        </p:spPr>
+      </p:sp>
+      <p:sp>
+        <p:nvSpPr>
+          <p:cNvPr id="11" name="Shape 9"/>
+          <p:cNvSpPr/>
+          <p:nvPr/>
+        </p:nvSpPr>
+        <p:spPr>
+          <a:xfrm>
+            <a:off x="614385" y="4028023"/>
+            <a:ext cx="871240" cy="306598"/>
+          </a:xfrm>
+          <a:prstGeom prst="rect">
+            <a:avLst/>
+          </a:prstGeom>
+          <a:ln w="9525">
+            <a:solidFill>
+              <a:srgbClr val="D1D9E0"/>
+            </a:solidFill>
+            <a:prstDash val="solid"/>
+          </a:ln>
+        </p:spPr>
+      </p:sp>
+      <p:sp>
+        <p:nvSpPr>
+          <p:cNvPr id="12" name="Text 10"/>
+          <p:cNvSpPr txBox="1"/>
+          <p:nvPr/>
+        </p:nvSpPr>
+        <p:spPr>
+          <a:xfrm>
+            <a:off x="662026" y="4089014"/>
+            <a:ext cx="816011" cy="182880"/>
+          </a:xfrm>
+          <a:prstGeom prst="rect">
+            <a:avLst/>
+          </a:prstGeom>
+          <a:noFill/>
+          <a:ln/>
+        </p:spPr>
+        <p:txBody>
+          <a:bodyPr wrap="none" lIns="0" tIns="0" rIns="0" bIns="0" rtlCol="0" anchor="t"/>
+          <a:lstStyle/>
+          <a:p>
+            <a:pPr algn="l" indent="0" marL="0">
+              <a:lnSpc>
+                <a:spcPts val="1440"/>
+              </a:lnSpc>
+              <a:buNone/>
+            </a:pPr>
+            <a:r>
+              <a:rPr lang="en-US" sz="960" b="1" spc="-22" kern="0" dirty="0">
+                <a:solidFill>
+                  <a:srgbClr val="1E1B4B"/>
+                </a:solidFill>
+                <a:latin typeface="STIX Two Text" pitchFamily="34" charset="0"/>
+                <a:ea typeface="STIX Two Text" pitchFamily="34" charset="-122"/>
+                <a:cs typeface="STIX Two Text" pitchFamily="34" charset="-120"/>
+              </a:rPr>
+              <a:t>MODEL</a:t>
+            </a:r>
+            <a:endParaRPr lang="en-US" sz="960" dirty="0"/>
+          </a:p>
+        </p:txBody>
+      </p:sp>
+      <p:sp>
+        <p:nvSpPr>
+          <p:cNvPr id="13" name="Shape 11"/>
+          <p:cNvSpPr/>
+          <p:nvPr/>
+        </p:nvSpPr>
+        <p:spPr>
+          <a:xfrm>
+            <a:off x="1485626" y="4028023"/>
+            <a:ext cx="490027" cy="306598"/>
+          </a:xfrm>
+          <a:prstGeom prst="rect">
+            <a:avLst/>
+          </a:prstGeom>
+          <a:ln w="9525">
+            <a:solidFill>
+              <a:srgbClr val="D1D9E0"/>
+            </a:solidFill>
+            <a:prstDash val="solid"/>
+          </a:ln>
+        </p:spPr>
+      </p:sp>
+      <p:sp>
+        <p:nvSpPr>
+          <p:cNvPr id="14" name="Text 12"/>
+          <p:cNvSpPr txBox="1"/>
+          <p:nvPr/>
+        </p:nvSpPr>
+        <p:spPr>
+          <a:xfrm>
+            <a:off x="1495135" y="4089014"/>
+            <a:ext cx="471007" cy="182880"/>
+          </a:xfrm>
+          <a:prstGeom prst="rect">
+            <a:avLst/>
+          </a:prstGeom>
+          <a:noFill/>
+          <a:ln/>
+        </p:spPr>
+        <p:txBody>
+          <a:bodyPr wrap="none" lIns="0" tIns="0" rIns="0" bIns="0" rtlCol="0" anchor="t"/>
+          <a:lstStyle/>
+          <a:p>
+            <a:pPr algn="ctr" indent="0" marL="0">
+              <a:lnSpc>
+                <a:spcPts val="1440"/>
+              </a:lnSpc>
+              <a:buNone/>
+            </a:pPr>
+            <a:r>
+              <a:rPr lang="en-US" sz="960" b="1" spc="-22" kern="0" dirty="0">
+                <a:solidFill>
+                  <a:srgbClr val="1E1B4B"/>
+                </a:solidFill>
+                <a:latin typeface="STIX Two Text" pitchFamily="34" charset="0"/>
+                <a:ea typeface="STIX Two Text" pitchFamily="34" charset="-122"/>
+                <a:cs typeface="STIX Two Text" pitchFamily="34" charset="-120"/>
+              </a:rPr>
+              <a:t>TIME</a:t>
+            </a:r>
+            <a:endParaRPr lang="en-US" sz="960" dirty="0"/>
+          </a:p>
+        </p:txBody>
+      </p:sp>
+      <p:sp>
+        <p:nvSpPr>
+          <p:cNvPr id="15" name="Shape 13"/>
+          <p:cNvSpPr/>
+          <p:nvPr/>
+        </p:nvSpPr>
+        <p:spPr>
+          <a:xfrm>
+            <a:off x="1975653" y="4028023"/>
+            <a:ext cx="822594" cy="306598"/>
+          </a:xfrm>
+          <a:prstGeom prst="rect">
+            <a:avLst/>
+          </a:prstGeom>
+          <a:ln w="9525">
+            <a:solidFill>
+              <a:srgbClr val="D1D9E0"/>
+            </a:solidFill>
+            <a:prstDash val="solid"/>
+          </a:ln>
+        </p:spPr>
+      </p:sp>
+      <p:sp>
+        <p:nvSpPr>
+          <p:cNvPr id="16" name="Text 14"/>
+          <p:cNvSpPr txBox="1"/>
+          <p:nvPr/>
+        </p:nvSpPr>
+        <p:spPr>
+          <a:xfrm>
+            <a:off x="1985162" y="4089014"/>
+            <a:ext cx="803575" cy="182880"/>
+          </a:xfrm>
+          <a:prstGeom prst="rect">
+            <a:avLst/>
+          </a:prstGeom>
+          <a:noFill/>
+          <a:ln/>
+        </p:spPr>
+        <p:txBody>
+          <a:bodyPr wrap="none" lIns="0" tIns="0" rIns="0" bIns="0" rtlCol="0" anchor="t"/>
+          <a:lstStyle/>
+          <a:p>
+            <a:pPr algn="ctr" indent="0" marL="0">
+              <a:lnSpc>
+                <a:spcPts val="1440"/>
+              </a:lnSpc>
+              <a:buNone/>
+            </a:pPr>
+            <a:r>
+              <a:rPr lang="en-US" sz="960" b="1" spc="-22" kern="0" dirty="0">
+                <a:solidFill>
+                  <a:srgbClr val="1E1B4B"/>
+                </a:solidFill>
+                <a:latin typeface="STIX Two Text" pitchFamily="34" charset="0"/>
+                <a:ea typeface="STIX Two Text" pitchFamily="34" charset="-122"/>
+                <a:cs typeface="STIX Two Text" pitchFamily="34" charset="-120"/>
+              </a:rPr>
+              <a:t>MEMORY</a:t>
+            </a:r>
+            <a:endParaRPr lang="en-US" sz="960" dirty="0"/>
+          </a:p>
+        </p:txBody>
+      </p:sp>
+      <p:sp>
+        <p:nvSpPr>
+          <p:cNvPr id="17" name="Shape 15"/>
+          <p:cNvSpPr/>
+          <p:nvPr/>
+        </p:nvSpPr>
+        <p:spPr>
+          <a:xfrm>
+            <a:off x="2798247" y="4028023"/>
+            <a:ext cx="792693" cy="306598"/>
+          </a:xfrm>
+          <a:prstGeom prst="rect">
+            <a:avLst/>
+          </a:prstGeom>
+          <a:ln w="9525">
+            <a:solidFill>
+              <a:srgbClr val="D1D9E0"/>
+            </a:solidFill>
+            <a:prstDash val="solid"/>
+          </a:ln>
+        </p:spPr>
+      </p:sp>
+      <p:sp>
+        <p:nvSpPr>
+          <p:cNvPr id="18" name="Text 16"/>
+          <p:cNvSpPr txBox="1"/>
+          <p:nvPr/>
+        </p:nvSpPr>
+        <p:spPr>
+          <a:xfrm>
+            <a:off x="2807757" y="4089014"/>
+            <a:ext cx="773582" cy="182880"/>
+          </a:xfrm>
+          <a:prstGeom prst="rect">
+            <a:avLst/>
+          </a:prstGeom>
+          <a:noFill/>
+          <a:ln/>
+        </p:spPr>
+        <p:txBody>
+          <a:bodyPr wrap="none" lIns="0" tIns="0" rIns="0" bIns="0" rtlCol="0" anchor="t"/>
+          <a:lstStyle/>
+          <a:p>
+            <a:pPr algn="ctr" indent="0" marL="0">
+              <a:lnSpc>
+                <a:spcPts val="1440"/>
+              </a:lnSpc>
+              <a:buNone/>
+            </a:pPr>
+            <a:r>
+              <a:rPr lang="en-US" sz="960" b="1" spc="-22" kern="0" dirty="0">
+                <a:solidFill>
+                  <a:srgbClr val="1E1B4B"/>
+                </a:solidFill>
+                <a:latin typeface="STIX Two Text" pitchFamily="34" charset="0"/>
+                <a:ea typeface="STIX Two Text" pitchFamily="34" charset="-122"/>
+                <a:cs typeface="STIX Two Text" pitchFamily="34" charset="-120"/>
+              </a:rPr>
+              <a:t>ACCURACY</a:t>
+            </a:r>
+            <a:endParaRPr lang="en-US" sz="960" dirty="0"/>
+          </a:p>
+        </p:txBody>
+      </p:sp>
+      <p:sp>
+        <p:nvSpPr>
+          <p:cNvPr id="19" name="Shape 17"/>
+          <p:cNvSpPr/>
+          <p:nvPr/>
+        </p:nvSpPr>
+        <p:spPr>
+          <a:xfrm>
+            <a:off x="614385" y="4334622"/>
+            <a:ext cx="2976555" cy="306598"/>
+          </a:xfrm>
+          <a:prstGeom prst="rect">
+            <a:avLst/>
+          </a:prstGeom>
+          <a:solidFill>
+            <a:srgbClr val="FFFFFF"/>
+          </a:solidFill>
+          <a:ln/>
+        </p:spPr>
+      </p:sp>
+      <p:sp>
+        <p:nvSpPr>
+          <p:cNvPr id="20" name="Shape 18"/>
+          <p:cNvSpPr/>
+          <p:nvPr/>
+        </p:nvSpPr>
+        <p:spPr>
+          <a:xfrm>
+            <a:off x="614385" y="4334622"/>
+            <a:ext cx="2976555" cy="9510"/>
+          </a:xfrm>
+          <a:prstGeom prst="rect">
+            <a:avLst/>
+          </a:prstGeom>
+          <a:solidFill>
+            <a:srgbClr val="D1D9E0">
+              <a:alpha val="70000"/>
+            </a:srgbClr>
+          </a:solidFill>
+          <a:ln/>
+        </p:spPr>
+      </p:sp>
+      <p:sp>
+        <p:nvSpPr>
+          <p:cNvPr id="21" name="Shape 19"/>
+          <p:cNvSpPr/>
+          <p:nvPr/>
+        </p:nvSpPr>
+        <p:spPr>
+          <a:xfrm>
+            <a:off x="614385" y="4631710"/>
+            <a:ext cx="2976555" cy="9510"/>
+          </a:xfrm>
+          <a:prstGeom prst="rect">
+            <a:avLst/>
+          </a:prstGeom>
+          <a:solidFill>
+            <a:srgbClr val="E2E8F0"/>
+          </a:solidFill>
+          <a:ln/>
+        </p:spPr>
+      </p:sp>
+      <p:sp>
+        <p:nvSpPr>
+          <p:cNvPr id="22" name="Shape 20"/>
+          <p:cNvSpPr/>
+          <p:nvPr/>
+        </p:nvSpPr>
+        <p:spPr>
+          <a:xfrm>
+            <a:off x="614385" y="4334622"/>
+            <a:ext cx="871240" cy="306598"/>
+          </a:xfrm>
+          <a:prstGeom prst="rect">
+            <a:avLst/>
+          </a:prstGeom>
+          <a:ln w="9525">
+            <a:solidFill>
+              <a:srgbClr val="D1D9E0"/>
+            </a:solidFill>
+            <a:prstDash val="solid"/>
+          </a:ln>
+        </p:spPr>
+      </p:sp>
+      <p:sp>
+        <p:nvSpPr>
+          <p:cNvPr id="23" name="Text 21"/>
+          <p:cNvSpPr txBox="1"/>
+          <p:nvPr/>
+        </p:nvSpPr>
+        <p:spPr>
+          <a:xfrm>
+            <a:off x="662026" y="4395612"/>
+            <a:ext cx="816011" cy="182880"/>
+          </a:xfrm>
+          <a:prstGeom prst="rect">
+            <a:avLst/>
+          </a:prstGeom>
+          <a:noFill/>
+          <a:ln/>
+        </p:spPr>
+        <p:txBody>
+          <a:bodyPr wrap="none" lIns="0" tIns="0" rIns="0" bIns="0" rtlCol="0" anchor="t"/>
+          <a:lstStyle/>
+          <a:p>
+            <a:pPr algn="l" indent="0" marL="0">
+              <a:lnSpc>
+                <a:spcPts val="1440"/>
+              </a:lnSpc>
+              <a:buNone/>
+            </a:pPr>
+            <a:r>
+              <a:rPr lang="en-US" sz="960" spc="-22" kern="0" dirty="0">
+                <a:solidFill>
+                  <a:srgbClr val="1E1B4B"/>
+                </a:solidFill>
+                <a:latin typeface="STIX Two Text" pitchFamily="34" charset="0"/>
+                <a:ea typeface="STIX Two Text" pitchFamily="34" charset="-122"/>
+                <a:cs typeface="STIX Two Text" pitchFamily="34" charset="-120"/>
+              </a:rPr>
+              <a:t>FlashAttn-3</a:t>
+            </a:r>
+            <a:endParaRPr lang="en-US" sz="960" dirty="0"/>
+          </a:p>
+        </p:txBody>
+      </p:sp>
+      <p:sp>
+        <p:nvSpPr>
+          <p:cNvPr id="24" name="Shape 22"/>
+          <p:cNvSpPr/>
+          <p:nvPr/>
+        </p:nvSpPr>
+        <p:spPr>
+          <a:xfrm>
+            <a:off x="1485626" y="4334622"/>
+            <a:ext cx="490027" cy="306598"/>
+          </a:xfrm>
+          <a:prstGeom prst="rect">
+            <a:avLst/>
+          </a:prstGeom>
+          <a:ln w="9525">
+            <a:solidFill>
+              <a:srgbClr val="D1D9E0"/>
+            </a:solidFill>
+            <a:prstDash val="solid"/>
+          </a:ln>
+        </p:spPr>
+      </p:sp>
+      <p:sp>
+        <p:nvSpPr>
+          <p:cNvPr id="25" name="Text 23"/>
+          <p:cNvSpPr txBox="1"/>
+          <p:nvPr/>
+        </p:nvSpPr>
+        <p:spPr>
+          <a:xfrm>
+            <a:off x="1495135" y="4395612"/>
+            <a:ext cx="471007" cy="182880"/>
+          </a:xfrm>
+          <a:prstGeom prst="rect">
+            <a:avLst/>
+          </a:prstGeom>
+          <a:noFill/>
+          <a:ln/>
+        </p:spPr>
+        <p:txBody>
+          <a:bodyPr wrap="none" lIns="0" tIns="0" rIns="0" bIns="0" rtlCol="0" anchor="t"/>
+          <a:lstStyle/>
+          <a:p>
+            <a:pPr algn="ctr" indent="0" marL="0">
+              <a:lnSpc>
+                <a:spcPts val="1440"/>
+              </a:lnSpc>
+              <a:buNone/>
+            </a:pPr>
+            <a:r>
+              <a:rPr lang="en-US" sz="960" spc="-22" kern="0" dirty="0">
+                <a:solidFill>
+                  <a:srgbClr val="1E1B4B"/>
+                </a:solidFill>
+                <a:latin typeface="STIX Two Text" pitchFamily="34" charset="0"/>
+                <a:ea typeface="STIX Two Text" pitchFamily="34" charset="-122"/>
+                <a:cs typeface="STIX Two Text" pitchFamily="34" charset="-120"/>
+              </a:rPr>
+              <a:t>O(N^2)</a:t>
+            </a:r>
+            <a:endParaRPr lang="en-US" sz="960" dirty="0"/>
+          </a:p>
+        </p:txBody>
+      </p:sp>
+      <p:sp>
+        <p:nvSpPr>
+          <p:cNvPr id="26" name="Shape 24"/>
+          <p:cNvSpPr/>
+          <p:nvPr/>
+        </p:nvSpPr>
+        <p:spPr>
+          <a:xfrm>
+            <a:off x="1975653" y="4334622"/>
+            <a:ext cx="822594" cy="306598"/>
+          </a:xfrm>
+          <a:prstGeom prst="rect">
+            <a:avLst/>
+          </a:prstGeom>
+          <a:ln w="9525">
+            <a:solidFill>
+              <a:srgbClr val="D1D9E0"/>
+            </a:solidFill>
+            <a:prstDash val="solid"/>
+          </a:ln>
+        </p:spPr>
+      </p:sp>
+      <p:sp>
+        <p:nvSpPr>
+          <p:cNvPr id="27" name="Text 25"/>
+          <p:cNvSpPr txBox="1"/>
+          <p:nvPr/>
+        </p:nvSpPr>
+        <p:spPr>
+          <a:xfrm>
+            <a:off x="1985162" y="4395612"/>
+            <a:ext cx="803575" cy="182880"/>
+          </a:xfrm>
+          <a:prstGeom prst="rect">
+            <a:avLst/>
+          </a:prstGeom>
+          <a:noFill/>
+          <a:ln/>
+        </p:spPr>
+        <p:txBody>
+          <a:bodyPr wrap="none" lIns="0" tIns="0" rIns="0" bIns="0" rtlCol="0" anchor="t"/>
+          <a:lstStyle/>
+          <a:p>
+            <a:pPr algn="ctr" indent="0" marL="0">
+              <a:lnSpc>
+                <a:spcPts val="1440"/>
+              </a:lnSpc>
+              <a:buNone/>
+            </a:pPr>
+            <a:r>
+              <a:rPr lang="en-US" sz="960" spc="-22" kern="0" dirty="0">
+                <a:solidFill>
+                  <a:srgbClr val="1E1B4B"/>
+                </a:solidFill>
+                <a:latin typeface="STIX Two Text" pitchFamily="34" charset="0"/>
+                <a:ea typeface="STIX Two Text" pitchFamily="34" charset="-122"/>
+                <a:cs typeface="STIX Two Text" pitchFamily="34" charset="-120"/>
+              </a:rPr>
+              <a:t>48.2 GB</a:t>
+            </a:r>
+            <a:endParaRPr lang="en-US" sz="960" dirty="0"/>
+          </a:p>
+        </p:txBody>
+      </p:sp>
+      <p:sp>
+        <p:nvSpPr>
+          <p:cNvPr id="28" name="Shape 26"/>
+          <p:cNvSpPr/>
+          <p:nvPr/>
+        </p:nvSpPr>
+        <p:spPr>
+          <a:xfrm>
+            <a:off x="2798247" y="4334622"/>
+            <a:ext cx="792693" cy="306598"/>
+          </a:xfrm>
+          <a:prstGeom prst="rect">
+            <a:avLst/>
+          </a:prstGeom>
+          <a:ln w="9525">
+            <a:solidFill>
+              <a:srgbClr val="D1D9E0"/>
+            </a:solidFill>
+            <a:prstDash val="solid"/>
+          </a:ln>
+        </p:spPr>
+      </p:sp>
+      <p:sp>
+        <p:nvSpPr>
+          <p:cNvPr id="29" name="Text 27"/>
+          <p:cNvSpPr txBox="1"/>
+          <p:nvPr/>
+        </p:nvSpPr>
+        <p:spPr>
+          <a:xfrm>
+            <a:off x="2807757" y="4395612"/>
+            <a:ext cx="773582" cy="182880"/>
+          </a:xfrm>
+          <a:prstGeom prst="rect">
+            <a:avLst/>
+          </a:prstGeom>
+          <a:noFill/>
+          <a:ln/>
+        </p:spPr>
+        <p:txBody>
+          <a:bodyPr wrap="none" lIns="0" tIns="0" rIns="0" bIns="0" rtlCol="0" anchor="t"/>
+          <a:lstStyle/>
+          <a:p>
+            <a:pPr algn="ctr" indent="0" marL="0">
+              <a:lnSpc>
+                <a:spcPts val="1440"/>
+              </a:lnSpc>
+              <a:buNone/>
+            </a:pPr>
+            <a:r>
+              <a:rPr lang="en-US" sz="960" spc="-22" kern="0" dirty="0">
+                <a:solidFill>
+                  <a:srgbClr val="1E1B4B"/>
+                </a:solidFill>
+                <a:latin typeface="STIX Two Text" pitchFamily="34" charset="0"/>
+                <a:ea typeface="STIX Two Text" pitchFamily="34" charset="-122"/>
+                <a:cs typeface="STIX Two Text" pitchFamily="34" charset="-120"/>
+              </a:rPr>
+              <a:t>99.9%</a:t>
+            </a:r>
+            <a:endParaRPr lang="en-US" sz="960" dirty="0"/>
+          </a:p>
+        </p:txBody>
+      </p:sp>
+      <p:sp>
+        <p:nvSpPr>
+          <p:cNvPr id="30" name="Shape 28"/>
+          <p:cNvSpPr/>
+          <p:nvPr/>
+        </p:nvSpPr>
+        <p:spPr>
+          <a:xfrm>
+            <a:off x="614385" y="4641220"/>
+            <a:ext cx="2976555" cy="306598"/>
+          </a:xfrm>
+          <a:prstGeom prst="rect">
+            <a:avLst/>
+          </a:prstGeom>
+          <a:solidFill>
+            <a:srgbClr val="F6F8FA"/>
+          </a:solidFill>
+          <a:ln/>
+        </p:spPr>
+      </p:sp>
+      <p:sp>
+        <p:nvSpPr>
+          <p:cNvPr id="31" name="Shape 29"/>
+          <p:cNvSpPr/>
+          <p:nvPr/>
+        </p:nvSpPr>
+        <p:spPr>
+          <a:xfrm>
+            <a:off x="614385" y="4641220"/>
+            <a:ext cx="2976555" cy="9510"/>
+          </a:xfrm>
+          <a:prstGeom prst="rect">
+            <a:avLst/>
+          </a:prstGeom>
+          <a:solidFill>
+            <a:srgbClr val="D1D9E0">
+              <a:alpha val="70000"/>
+            </a:srgbClr>
+          </a:solidFill>
+          <a:ln/>
+        </p:spPr>
+      </p:sp>
+      <p:sp>
+        <p:nvSpPr>
+          <p:cNvPr id="32" name="Shape 30"/>
+          <p:cNvSpPr/>
+          <p:nvPr/>
+        </p:nvSpPr>
+        <p:spPr>
+          <a:xfrm>
+            <a:off x="614385" y="4641220"/>
+            <a:ext cx="871240" cy="306598"/>
+          </a:xfrm>
+          <a:prstGeom prst="rect">
+            <a:avLst/>
+          </a:prstGeom>
+          <a:ln w="9525">
+            <a:solidFill>
+              <a:srgbClr val="D1D9E0"/>
+            </a:solidFill>
+            <a:prstDash val="solid"/>
+          </a:ln>
+        </p:spPr>
+      </p:sp>
+      <p:sp>
+        <p:nvSpPr>
+          <p:cNvPr id="33" name="Text 31"/>
+          <p:cNvSpPr txBox="1"/>
+          <p:nvPr/>
+        </p:nvSpPr>
+        <p:spPr>
+          <a:xfrm>
+            <a:off x="662026" y="4702211"/>
+            <a:ext cx="816011" cy="182880"/>
+          </a:xfrm>
+          <a:prstGeom prst="rect">
+            <a:avLst/>
+          </a:prstGeom>
+          <a:noFill/>
+          <a:ln/>
+        </p:spPr>
+        <p:txBody>
+          <a:bodyPr wrap="none" lIns="0" tIns="0" rIns="0" bIns="0" rtlCol="0" anchor="t"/>
+          <a:lstStyle/>
+          <a:p>
+            <a:pPr algn="l" indent="0" marL="0">
+              <a:lnSpc>
+                <a:spcPts val="1440"/>
+              </a:lnSpc>
+              <a:buNone/>
+            </a:pPr>
+            <a:r>
+              <a:rPr lang="en-US" sz="960" b="1" spc="-22" kern="0" dirty="0">
+                <a:solidFill>
+                  <a:srgbClr val="4338CA"/>
+                </a:solidFill>
+                <a:latin typeface="STIX Two Text" pitchFamily="34" charset="0"/>
+                <a:ea typeface="STIX Two Text" pitchFamily="34" charset="-122"/>
+                <a:cs typeface="STIX Two Text" pitchFamily="34" charset="-120"/>
+              </a:rPr>
+              <a:t>Ours (Linear)</a:t>
+            </a:r>
+            <a:endParaRPr lang="en-US" sz="960" dirty="0"/>
+          </a:p>
+        </p:txBody>
+      </p:sp>
+      <p:sp>
+        <p:nvSpPr>
+          <p:cNvPr id="34" name="Shape 32"/>
+          <p:cNvSpPr/>
+          <p:nvPr/>
+        </p:nvSpPr>
+        <p:spPr>
+          <a:xfrm>
+            <a:off x="1485626" y="4641220"/>
+            <a:ext cx="490027" cy="306598"/>
+          </a:xfrm>
+          <a:prstGeom prst="rect">
+            <a:avLst/>
+          </a:prstGeom>
+          <a:ln w="9525">
+            <a:solidFill>
+              <a:srgbClr val="D1D9E0"/>
+            </a:solidFill>
+            <a:prstDash val="solid"/>
+          </a:ln>
+        </p:spPr>
+      </p:sp>
+      <p:sp>
+        <p:nvSpPr>
+          <p:cNvPr id="35" name="Text 33"/>
+          <p:cNvSpPr txBox="1"/>
+          <p:nvPr/>
+        </p:nvSpPr>
+        <p:spPr>
+          <a:xfrm>
+            <a:off x="1495135" y="4702211"/>
+            <a:ext cx="471007" cy="182880"/>
+          </a:xfrm>
+          <a:prstGeom prst="rect">
+            <a:avLst/>
+          </a:prstGeom>
+          <a:noFill/>
+          <a:ln/>
+        </p:spPr>
+        <p:txBody>
+          <a:bodyPr wrap="none" lIns="0" tIns="0" rIns="0" bIns="0" rtlCol="0" anchor="t"/>
+          <a:lstStyle/>
+          <a:p>
+            <a:pPr algn="ctr" indent="0" marL="0">
+              <a:lnSpc>
+                <a:spcPts val="1440"/>
+              </a:lnSpc>
+              <a:buNone/>
+            </a:pPr>
+            <a:r>
+              <a:rPr lang="en-US" sz="960" b="1" spc="-22" kern="0" dirty="0">
+                <a:solidFill>
+                  <a:srgbClr val="4338CA"/>
+                </a:solidFill>
+                <a:latin typeface="STIX Two Text" pitchFamily="34" charset="0"/>
+                <a:ea typeface="STIX Two Text" pitchFamily="34" charset="-122"/>
+                <a:cs typeface="STIX Two Text" pitchFamily="34" charset="-120"/>
+              </a:rPr>
+              <a:t>O(N)</a:t>
+            </a:r>
+            <a:endParaRPr lang="en-US" sz="960" dirty="0"/>
+          </a:p>
+        </p:txBody>
+      </p:sp>
+      <p:sp>
+        <p:nvSpPr>
+          <p:cNvPr id="36" name="Shape 34"/>
+          <p:cNvSpPr/>
+          <p:nvPr/>
+        </p:nvSpPr>
+        <p:spPr>
+          <a:xfrm>
+            <a:off x="1975653" y="4641220"/>
+            <a:ext cx="822594" cy="306598"/>
+          </a:xfrm>
+          <a:prstGeom prst="rect">
+            <a:avLst/>
+          </a:prstGeom>
+          <a:ln w="9525">
+            <a:solidFill>
+              <a:srgbClr val="D1D9E0"/>
+            </a:solidFill>
+            <a:prstDash val="solid"/>
+          </a:ln>
+        </p:spPr>
+      </p:sp>
+      <p:sp>
+        <p:nvSpPr>
+          <p:cNvPr id="37" name="Text 35"/>
+          <p:cNvSpPr txBox="1"/>
+          <p:nvPr/>
+        </p:nvSpPr>
+        <p:spPr>
+          <a:xfrm>
+            <a:off x="1985162" y="4702211"/>
+            <a:ext cx="803575" cy="182880"/>
+          </a:xfrm>
+          <a:prstGeom prst="rect">
+            <a:avLst/>
+          </a:prstGeom>
+          <a:noFill/>
+          <a:ln/>
+        </p:spPr>
+        <p:txBody>
+          <a:bodyPr wrap="none" lIns="0" tIns="0" rIns="0" bIns="0" rtlCol="0" anchor="t"/>
+          <a:lstStyle/>
+          <a:p>
+            <a:pPr algn="ctr" indent="0" marL="0">
+              <a:lnSpc>
+                <a:spcPts val="1440"/>
+              </a:lnSpc>
+              <a:buNone/>
+            </a:pPr>
+            <a:r>
+              <a:rPr lang="en-US" sz="960" b="1" spc="-22" kern="0" dirty="0">
+                <a:solidFill>
+                  <a:srgbClr val="4338CA"/>
+                </a:solidFill>
+                <a:latin typeface="STIX Two Text" pitchFamily="34" charset="0"/>
+                <a:ea typeface="STIX Two Text" pitchFamily="34" charset="-122"/>
+                <a:cs typeface="STIX Two Text" pitchFamily="34" charset="-120"/>
+              </a:rPr>
+              <a:t>1.2 GB (-97%)</a:t>
+            </a:r>
+            <a:endParaRPr lang="en-US" sz="960" dirty="0"/>
+          </a:p>
+        </p:txBody>
+      </p:sp>
+      <p:sp>
+        <p:nvSpPr>
+          <p:cNvPr id="38" name="Shape 36"/>
+          <p:cNvSpPr/>
+          <p:nvPr/>
+        </p:nvSpPr>
+        <p:spPr>
+          <a:xfrm>
+            <a:off x="2798247" y="4641220"/>
+            <a:ext cx="792693" cy="306598"/>
+          </a:xfrm>
+          <a:prstGeom prst="rect">
+            <a:avLst/>
+          </a:prstGeom>
+          <a:ln w="9525">
+            <a:solidFill>
+              <a:srgbClr val="D1D9E0"/>
+            </a:solidFill>
+            <a:prstDash val="solid"/>
+          </a:ln>
+        </p:spPr>
+      </p:sp>
+      <p:sp>
+        <p:nvSpPr>
+          <p:cNvPr id="39" name="Text 37"/>
+          <p:cNvSpPr txBox="1"/>
+          <p:nvPr/>
+        </p:nvSpPr>
+        <p:spPr>
+          <a:xfrm>
+            <a:off x="2807757" y="4702211"/>
+            <a:ext cx="773582" cy="182880"/>
+          </a:xfrm>
+          <a:prstGeom prst="rect">
+            <a:avLst/>
+          </a:prstGeom>
+          <a:noFill/>
+          <a:ln/>
+        </p:spPr>
+        <p:txBody>
+          <a:bodyPr wrap="none" lIns="0" tIns="0" rIns="0" bIns="0" rtlCol="0" anchor="t"/>
+          <a:lstStyle/>
+          <a:p>
+            <a:pPr algn="ctr" indent="0" marL="0">
+              <a:lnSpc>
+                <a:spcPts val="1440"/>
+              </a:lnSpc>
+              <a:buNone/>
+            </a:pPr>
+            <a:r>
+              <a:rPr lang="en-US" sz="960" b="1" spc="-22" kern="0" dirty="0">
+                <a:solidFill>
+                  <a:srgbClr val="4338CA"/>
+                </a:solidFill>
+                <a:latin typeface="STIX Two Text" pitchFamily="34" charset="0"/>
+                <a:ea typeface="STIX Two Text" pitchFamily="34" charset="-122"/>
+                <a:cs typeface="STIX Two Text" pitchFamily="34" charset="-120"/>
+              </a:rPr>
+              <a:t>99.8%</a:t>
+            </a:r>
+            <a:endParaRPr lang="en-US" sz="960" dirty="0"/>
+          </a:p>
+        </p:txBody>
+      </p:sp>
+      <p:sp>
+        <p:nvSpPr>
+          <p:cNvPr id="40" name="Shape 38"/>
+          <p:cNvSpPr/>
+          <p:nvPr/>
+        </p:nvSpPr>
+        <p:spPr>
+          <a:xfrm>
+            <a:off x="7284750" y="4004249"/>
+            <a:ext cx="4297680" cy="1119774"/>
+          </a:xfrm>
+          <a:prstGeom prst="rect">
+            <a:avLst/>
+          </a:prstGeom>
+          <a:solidFill>
+            <a:srgbClr val="F1F0EA"/>
+          </a:solidFill>
+          <a:ln/>
+        </p:spPr>
+      </p:sp>
+      <p:sp>
+        <p:nvSpPr>
+          <p:cNvPr id="41" name="Shape 39"/>
+          <p:cNvSpPr/>
+          <p:nvPr/>
+        </p:nvSpPr>
+        <p:spPr>
+          <a:xfrm>
+            <a:off x="7284750" y="4004249"/>
+            <a:ext cx="38130" cy="1119774"/>
+          </a:xfrm>
+          <a:prstGeom prst="rect">
+            <a:avLst/>
+          </a:prstGeom>
+          <a:solidFill>
+            <a:srgbClr val="1E1B4B"/>
+          </a:solidFill>
+          <a:ln/>
+        </p:spPr>
+      </p:sp>
+      <p:sp>
+        <p:nvSpPr>
+          <p:cNvPr id="42" name="Text 40"/>
+          <p:cNvSpPr txBox="1"/>
+          <p:nvPr/>
+        </p:nvSpPr>
+        <p:spPr>
+          <a:xfrm>
+            <a:off x="7475220" y="4110319"/>
+            <a:ext cx="3954780" cy="356616"/>
+          </a:xfrm>
+          <a:prstGeom prst="rect">
+            <a:avLst/>
+          </a:prstGeom>
+          <a:noFill/>
+          <a:ln/>
+        </p:spPr>
+        <p:txBody>
+          <a:bodyPr wrap="square" lIns="0" tIns="0" rIns="0" bIns="0" rtlCol="0" anchor="t"/>
+          <a:lstStyle/>
+          <a:p>
+            <a:pPr algn="l" indent="0" marL="0">
+              <a:lnSpc>
+                <a:spcPts val="1404"/>
+              </a:lnSpc>
+              <a:buNone/>
+            </a:pPr>
+            <a:r>
+              <a:rPr lang="en-US" sz="936" b="1" spc="-22" kern="0" dirty="0">
+                <a:solidFill>
+                  <a:srgbClr val="1E1B4B"/>
+                </a:solidFill>
+                <a:latin typeface="STIX Two Text" pitchFamily="34" charset="0"/>
+                <a:ea typeface="STIX Two Text" pitchFamily="34" charset="-122"/>
+                <a:cs typeface="STIX Two Text" pitchFamily="34" charset="-120"/>
+              </a:rPr>
+              <a:t>Remark 2.1.</a:t>
+            </a:r>
+            <a:pPr algn="l" indent="0" marL="0">
+              <a:lnSpc>
+                <a:spcPts val="1404"/>
+              </a:lnSpc>
+              <a:buNone/>
+            </a:pPr>
+            <a:r>
+              <a:rPr lang="en-US" sz="936" spc="-22" kern="0" dirty="0">
+                <a:solidFill>
+                  <a:srgbClr val="1E1B4B"/>
+                </a:solidFill>
+                <a:latin typeface="STIX Two Text" pitchFamily="34" charset="0"/>
+                <a:ea typeface="STIX Two Text" pitchFamily="34" charset="-122"/>
+                <a:cs typeface="STIX Two Text" pitchFamily="34" charset="-120"/>
+              </a:rPr>
+              <a:t> The memory reduction enables full fine-tuning of a 70B parameter model on a single 8x H100 node with sequence length \( N = 10^6 \).</a:t>
+            </a:r>
+            <a:endParaRPr lang="en-US" sz="936" dirty="0"/>
+          </a:p>
+        </p:txBody>
+      </p:sp>
+      <p:sp>
+        <p:nvSpPr>
+          <p:cNvPr id="43" name="Text 41"/>
+          <p:cNvSpPr txBox="1"/>
+          <p:nvPr/>
+        </p:nvSpPr>
+        <p:spPr>
+          <a:xfrm>
+            <a:off x="590520" y="6268303"/>
+            <a:ext cx="11869644" cy="164592"/>
+          </a:xfrm>
+          <a:prstGeom prst="rect">
+            <a:avLst/>
+          </a:prstGeom>
+          <a:noFill/>
+          <a:ln/>
+        </p:spPr>
+        <p:txBody>
+          <a:bodyPr wrap="none" lIns="0" tIns="0" rIns="0" bIns="0" rtlCol="0" anchor="t"/>
+          <a:lstStyle/>
+          <a:p>
+            <a:pPr algn="l" indent="0" marL="0">
+              <a:lnSpc>
+                <a:spcPts val="1296"/>
+              </a:lnSpc>
+              <a:buNone/>
+            </a:pPr>
+            <a:r>
+              <a:rPr lang="en-US" sz="864" spc="-22" kern="0" dirty="0">
+                <a:solidFill>
+                  <a:srgbClr val="64748B"/>
+                </a:solidFill>
+                <a:latin typeface="STIX Two Text" pitchFamily="34" charset="0"/>
+                <a:ea typeface="STIX Two Text" pitchFamily="34" charset="-122"/>
+                <a:cs typeface="STIX Two Text" pitchFamily="34" charset="-120"/>
+              </a:rPr>
+              <a:t>* Evaluated on synthetic Needle-In-A-Haystack benchmark with Llama-3 architecture.</a:t>
+            </a:r>
+            <a:endParaRPr lang="en-US" sz="864" dirty="0"/>
+          </a:p>
+        </p:txBody>
+      </p:sp>
     </p:spTree>
   </p:cSld>
   <p:clrMapOvr>
